--- a/5. Asynchronous vs Parallel Programming/AsyncVsParallel.pptx
+++ b/5. Asynchronous vs Parallel Programming/AsyncVsParallel.pptx
@@ -254,7 +254,7 @@
               <a:rPr lang="en-US" smtClean="0">
                 <a:latin typeface="Segoe UI" pitchFamily="34" charset="0"/>
               </a:rPr>
-              <a:t>9/12/26 4:17 PM</a:t>
+              <a:t>9/14/26 7:54 PM</a:t>
             </a:fld>
             <a:endParaRPr lang="en-US">
               <a:latin typeface="Segoe UI" pitchFamily="34" charset="0"/>
@@ -532,7 +532,7 @@
           <a:p>
             <a:fld id="{D18B56EA-E28F-4F92-9F16-7A6F2501B303}" type="datetime8">
               <a:rPr lang="en-US" smtClean="0"/>
-              <a:t>9/12/26 4:17 PM</a:t>
+              <a:t>9/14/26 7:54 PM</a:t>
             </a:fld>
             <a:endParaRPr lang="en-US"/>
           </a:p>
@@ -8768,7 +8768,7 @@
       </p:sp>
       <p:pic>
         <p:nvPicPr>
-          <p:cNvPr id="4" name="Picture 3" descr="slide14.png"/>
+          <p:cNvPr id="4" name="Picture 3" descr="lazy_singleton.png"/>
           <p:cNvPicPr>
             <a:picLocks noChangeAspect="1"/>
           </p:cNvPicPr>
@@ -8776,15 +8776,14 @@
         </p:nvPicPr>
         <p:blipFill>
           <a:blip r:embed="rId3"/>
-          <a:srcRect l="7870" t="14183" r="8961" b="37529"/>
           <a:stretch>
             <a:fillRect/>
           </a:stretch>
         </p:blipFill>
         <p:spPr>
           <a:xfrm>
-            <a:off x="6139541" y="4049487"/>
-            <a:ext cx="5475515" cy="2111828"/>
+            <a:off x="5565790" y="3250000"/>
+            <a:ext cx="6049266" cy="3550000"/>
           </a:xfrm>
           <a:prstGeom prst="rect">
             <a:avLst/>
@@ -9324,7 +9323,7 @@
             <a:pPr lvl="2"/>
             <a:r>
               <a:rPr lang="en-US" dirty="0"/>
-              <a:t>By default, and only once it actually yields</a:t>
+              <a:t>Only when Task hasn’t already completed</a:t>
             </a:r>
           </a:p>
           <a:p>
@@ -11700,16 +11699,6 @@
 </file>
 
 <file path=customXml/item1.xml><?xml version="1.0" encoding="utf-8"?>
-<p:properties xmlns:p="http://schemas.microsoft.com/office/2006/metadata/properties" xmlns:xsi="http://www.w3.org/2001/XMLSchema-instance" xmlns:pc="http://schemas.microsoft.com/office/infopath/2007/PartnerControls">
-  <documentManagement>
-    <_ip_UnifiedCompliancePolicyUIAction xmlns="http://schemas.microsoft.com/sharepoint/v3" xsi:nil="true"/>
-    <MediaServiceKeyPoints xmlns="16dc66bd-df5a-4495-a5c9-5e296f49988a" xsi:nil="true"/>
-    <_ip_UnifiedCompliancePolicyProperties xmlns="http://schemas.microsoft.com/sharepoint/v3" xsi:nil="true"/>
-  </documentManagement>
-</p:properties>
-</file>
-
-<file path=customXml/item2.xml><?xml version="1.0" encoding="utf-8"?>
 <ct:contentTypeSchema xmlns:ct="http://schemas.microsoft.com/office/2006/metadata/contentType" xmlns:ma="http://schemas.microsoft.com/office/2006/metadata/properties/metaAttributes" ct:_="" ma:_="" ma:contentTypeName="Document" ma:contentTypeID="0x010100A33D2391BFF58241AEB203BD95DC1F89" ma:contentTypeVersion="16" ma:contentTypeDescription="Create a new document." ma:contentTypeScope="" ma:versionID="bd4b5e6fa70efd11586bd069caa6259f">
   <xsd:schema xmlns:xsd="http://www.w3.org/2001/XMLSchema" xmlns:xs="http://www.w3.org/2001/XMLSchema" xmlns:p="http://schemas.microsoft.com/office/2006/metadata/properties" xmlns:ns1="http://schemas.microsoft.com/sharepoint/v3" xmlns:ns2="16dc66bd-df5a-4495-a5c9-5e296f49988a" xmlns:ns3="12239fb0-26c0-4a37-b790-6c81fba9d0fc" targetNamespace="http://schemas.microsoft.com/office/2006/metadata/properties" ma:root="true" ma:fieldsID="1236f19879e555dfdef409a5be7c6d72" ns1:_="" ns2:_="" ns3:_="">
     <xsd:import namespace="http://schemas.microsoft.com/sharepoint/v3"/>
@@ -11955,6 +11944,16 @@
 </ct:contentTypeSchema>
 </file>
 
+<file path=customXml/item2.xml><?xml version="1.0" encoding="utf-8"?>
+<p:properties xmlns:p="http://schemas.microsoft.com/office/2006/metadata/properties" xmlns:xsi="http://www.w3.org/2001/XMLSchema-instance" xmlns:pc="http://schemas.microsoft.com/office/infopath/2007/PartnerControls">
+  <documentManagement>
+    <_ip_UnifiedCompliancePolicyUIAction xmlns="http://schemas.microsoft.com/sharepoint/v3" xsi:nil="true"/>
+    <MediaServiceKeyPoints xmlns="16dc66bd-df5a-4495-a5c9-5e296f49988a" xsi:nil="true"/>
+    <_ip_UnifiedCompliancePolicyProperties xmlns="http://schemas.microsoft.com/sharepoint/v3" xsi:nil="true"/>
+  </documentManagement>
+</p:properties>
+</file>
+
 <file path=customXml/item3.xml><?xml version="1.0" encoding="utf-8"?>
 <?mso-contentType ?>
 <FormTemplates xmlns="http://schemas.microsoft.com/sharepoint/v3/contenttype/forms">
@@ -11965,24 +11964,6 @@
 </file>
 
 <file path=customXml/itemProps1.xml><?xml version="1.0" encoding="utf-8"?>
-<ds:datastoreItem xmlns:ds="http://schemas.openxmlformats.org/officeDocument/2006/customXml" ds:itemID="{B59C5458-A72E-4627-9FFC-D350DCB4700F}">
-  <ds:schemaRefs>
-    <ds:schemaRef ds:uri="http://schemas.microsoft.com/office/2006/metadata/properties"/>
-    <ds:schemaRef ds:uri="http://schemas.openxmlformats.org/package/2006/metadata/core-properties"/>
-    <ds:schemaRef ds:uri="http://purl.org/dc/dcmitype/"/>
-    <ds:schemaRef ds:uri="http://schemas.microsoft.com/office/infopath/2007/PartnerControls"/>
-    <ds:schemaRef ds:uri="http://schemas.microsoft.com/sharepoint/v3"/>
-    <ds:schemaRef ds:uri="http://purl.org/dc/elements/1.1/"/>
-    <ds:schemaRef ds:uri="http://schemas.microsoft.com/office/2006/documentManagement/types"/>
-    <ds:schemaRef ds:uri="12239fb0-26c0-4a37-b790-6c81fba9d0fc"/>
-    <ds:schemaRef ds:uri="16dc66bd-df5a-4495-a5c9-5e296f49988a"/>
-    <ds:schemaRef ds:uri="http://www.w3.org/XML/1998/namespace"/>
-    <ds:schemaRef ds:uri="http://purl.org/dc/terms/"/>
-  </ds:schemaRefs>
-</ds:datastoreItem>
-</file>
-
-<file path=customXml/itemProps2.xml><?xml version="1.0" encoding="utf-8"?>
 <ds:datastoreItem xmlns:ds="http://schemas.openxmlformats.org/officeDocument/2006/customXml" ds:itemID="{F517AA3B-FC88-46DF-B5BA-DC6634CFCC94}">
   <ds:schemaRefs>
     <ds:schemaRef ds:uri="12239fb0-26c0-4a37-b790-6c81fba9d0fc"/>
@@ -12002,6 +11983,24 @@
 </ds:datastoreItem>
 </file>
 
+<file path=customXml/itemProps2.xml><?xml version="1.0" encoding="utf-8"?>
+<ds:datastoreItem xmlns:ds="http://schemas.openxmlformats.org/officeDocument/2006/customXml" ds:itemID="{B59C5458-A72E-4627-9FFC-D350DCB4700F}">
+  <ds:schemaRefs>
+    <ds:schemaRef ds:uri="http://schemas.microsoft.com/office/2006/metadata/properties"/>
+    <ds:schemaRef ds:uri="http://schemas.openxmlformats.org/package/2006/metadata/core-properties"/>
+    <ds:schemaRef ds:uri="http://purl.org/dc/dcmitype/"/>
+    <ds:schemaRef ds:uri="http://schemas.microsoft.com/office/infopath/2007/PartnerControls"/>
+    <ds:schemaRef ds:uri="http://schemas.microsoft.com/sharepoint/v3"/>
+    <ds:schemaRef ds:uri="http://purl.org/dc/elements/1.1/"/>
+    <ds:schemaRef ds:uri="http://schemas.microsoft.com/office/2006/documentManagement/types"/>
+    <ds:schemaRef ds:uri="12239fb0-26c0-4a37-b790-6c81fba9d0fc"/>
+    <ds:schemaRef ds:uri="16dc66bd-df5a-4495-a5c9-5e296f49988a"/>
+    <ds:schemaRef ds:uri="http://www.w3.org/XML/1998/namespace"/>
+    <ds:schemaRef ds:uri="http://purl.org/dc/terms/"/>
+  </ds:schemaRefs>
+</ds:datastoreItem>
+</file>
+
 <file path=customXml/itemProps3.xml><?xml version="1.0" encoding="utf-8"?>
 <ds:datastoreItem xmlns:ds="http://schemas.openxmlformats.org/officeDocument/2006/customXml" ds:itemID="{758FDAC0-319D-4A54-8D8E-1D42CB1F8004}">
   <ds:schemaRefs>

--- a/5. Asynchronous vs Parallel Programming/AsyncVsParallel.pptx
+++ b/5. Asynchronous vs Parallel Programming/AsyncVsParallel.pptx
@@ -838,7 +838,7 @@
           </a:p>
           <a:p>
             <a:r>
-              <a:t>This matters for a very practical reason. The moment two threads run your code at the same time, every field they share becomes a shared resource, and code you have read a hundred times becomes wrong. This morning we look at three bugs in a checkout app. All three pass a single-user test. All three fall apart the first time real traffic arrives.</a:t>
+              <a:t>This matters for a very practical reason. The moment two threads run your code at the same time, every field they share becomes a shared resource, and code you have read a hundred times becomes wrong. This morning we look at four bugs in a checkout app. Three of them pass a single-user test and fall apart the first time real traffic arrives. The fourth does not even need traffic: it hangs on the very first request.</a:t>
             </a:r>
           </a:p>
           <a:p>
@@ -1238,7 +1238,7 @@
           </a:p>
           <a:p>
             <a:r>
-              <a:t>And if the shared state is a collection, do not wrap a Dictionary or a List in a lock and hope. The System.Collections.Concurrent types exist for exactly that, and we spend a whole section on them this afternoon.</a:t>
+              <a:t>And if the shared state is a collection, remember that List and Dictionary are not thread safe. The audit trail in this challenge is one small list, and a lock around every read and write of it is all it needs, so reaching for a concurrent collection there would hide the lesson. When a collection is shared by many threads adding and taking all day, the System.Collections.Concurrent types exist for exactly that, and we spend a whole section on them this afternoon.</a:t>
             </a:r>
           </a:p>
           <a:p>
@@ -1324,7 +1324,7 @@
           <a:lstStyle/>
           <a:p>
             <a:r>
-              <a:t>Open 5. Asynchronous vs Parallel Programming, 1. Start, OrderPortal.slnx. Build it once, run it on localhost port 5007, and press the button so you see the red cards yourself before you change anything.</a:t>
+              <a:t>Open 5. Asynchronous vs Parallel Programming, 1. Start, OrderPortal.slnx. Build it once, run it on localhost port 5007, and press Run 2000 checkouts so you see the red cards yourself before you change anything. The workshop guide docked beside the Checkout page walks you through the challenge one step at a time: four steps, one bug each, and each step unlocks only after the one before it passes.</a:t>
             </a:r>
           </a:p>
           <a:p>
@@ -1332,7 +1332,7 @@
           </a:p>
           <a:p>
             <a:r>
-              <a:t>You are editing three files: OrderMetrics.cs, TaxRateProvider.cs and InventoryLedger.cs. Every ToDo Refactor comment marks a bug, but they are not the whole list. The unguarded property getters, the two Reset methods and the lookup counter carry no comment at all, and that is deliberate, because in real code nobody labels them either. The README requirements are the complete checklist. Leave CheckoutService, the page, and the singleton registrations alone. The load is not the bug; the load is the test.</a:t>
+              <a:t>You are editing three files: OrderMetrics.cs, TaxRateProvider.cs and InventoryLedger.cs. Every ToDo Refactor comment names the step that checks it. The comments cover the property getters, both Reset methods and the lookup counter as well, because every one of them touches the same shared state. Stale and torn reads almost never show up in a test, so the steps list the getters as tasks rather than trusting a check to catch them. Fix them on purpose. Leave CheckoutService, the page, and the singleton registrations alone. The load is not the bug; the load is the test.</a:t>
             </a:r>
           </a:p>
           <a:p>
@@ -1340,7 +1340,7 @@
           </a:p>
           <a:p>
             <a:r>
-              <a:t>You are done when Orders recorded reads 2000, Revenue matches the expected total, Tax table builds reads 1, and Reserve stock answers immediately. Then press the button five more times, because a race condition that passes once has not been fixed, it has been lucky.</a:t>
+              <a:t>You are done when the workshop guide shows 4 of 4 steps pass, Orders recorded reads 2000, Revenue matches the expected total, Tax table builds reads 1, and Reserve stock answers immediately. Then press Run 2000 checkouts five more times, because a race condition that passes once has not been fixed, it has been lucky.</a:t>
             </a:r>
           </a:p>
           <a:p>
@@ -1638,7 +1638,7 @@
           </a:p>
           <a:p>
             <a:r>
-              <a:t>It is also bounded, and the ceiling has a name. Environment.ProcessorCount is how many threads can genuinely run at once, and it is the default degree of parallelism for the Parallel class. Spinning up thirty-two threads on an eight-core machine does not make it four times faster; it makes the operating system spend its time switching between them. Remember that number, because it turns up again as an answer in the app you are about to fix.</a:t>
+              <a:t>It is also bounded, and the ceiling has a name. Environment.ProcessorCount is how many threads can genuinely run at once, and it is the default degree of parallelism for Parallel.ForEachAsync. Spinning up thirty-two threads on an eight-core machine does not make it four times faster; it makes the operating system spend its time switching between them. Remember that number, because it turns up again as an answer in the app you are about to fix.</a:t>
             </a:r>
           </a:p>
           <a:p>
@@ -1850,7 +1850,7 @@
           </a:p>
           <a:p>
             <a:r>
-              <a:t>The OrderPortal app has both. Two race conditions in the metrics and the tax provider, and one deadlock in the inventory ledger. Over the next few slides we walk through what causes each one, and the four tools .NET gives you to prevent them.</a:t>
+              <a:t>The OrderPortal app has both. Race conditions in the order count, the revenue and the tax table, and one deadlock in the inventory ledger. Over the next few slides we walk through what causes each one, and the four tools .NET gives you to prevent them.</a:t>
             </a:r>
           </a:p>
           <a:p>
